--- a/ゲーム科1年/00_前期/ゲームプログラミングⅢ/ゲーム数学/座学/00_点の定義.pptx
+++ b/ゲーム科1年/00_前期/ゲームプログラミングⅢ/ゲーム数学/座学/00_点の定義.pptx
@@ -267,7 +267,7 @@
           <a:p>
             <a:fld id="{E9CC885B-4903-4D54-9A93-00025F12DED9}" type="datetimeFigureOut">
               <a:rPr kumimoji="1" lang="ja-JP" altLang="en-US" smtClean="0"/>
-              <a:t>2024/10/2</a:t>
+              <a:t>2025/6/10</a:t>
             </a:fld>
             <a:endParaRPr kumimoji="1" lang="ja-JP" altLang="en-US"/>
           </a:p>
@@ -497,7 +497,7 @@
           <a:p>
             <a:fld id="{E9CC885B-4903-4D54-9A93-00025F12DED9}" type="datetimeFigureOut">
               <a:rPr kumimoji="1" lang="ja-JP" altLang="en-US" smtClean="0"/>
-              <a:t>2024/10/2</a:t>
+              <a:t>2025/6/10</a:t>
             </a:fld>
             <a:endParaRPr kumimoji="1" lang="ja-JP" altLang="en-US"/>
           </a:p>
@@ -737,7 +737,7 @@
           <a:p>
             <a:fld id="{E9CC885B-4903-4D54-9A93-00025F12DED9}" type="datetimeFigureOut">
               <a:rPr kumimoji="1" lang="ja-JP" altLang="en-US" smtClean="0"/>
-              <a:t>2024/10/2</a:t>
+              <a:t>2025/6/10</a:t>
             </a:fld>
             <a:endParaRPr kumimoji="1" lang="ja-JP" altLang="en-US"/>
           </a:p>
@@ -967,7 +967,7 @@
           <a:p>
             <a:fld id="{E9CC885B-4903-4D54-9A93-00025F12DED9}" type="datetimeFigureOut">
               <a:rPr kumimoji="1" lang="ja-JP" altLang="en-US" smtClean="0"/>
-              <a:t>2024/10/2</a:t>
+              <a:t>2025/6/10</a:t>
             </a:fld>
             <a:endParaRPr kumimoji="1" lang="ja-JP" altLang="en-US"/>
           </a:p>
@@ -1242,7 +1242,7 @@
           <a:p>
             <a:fld id="{E9CC885B-4903-4D54-9A93-00025F12DED9}" type="datetimeFigureOut">
               <a:rPr kumimoji="1" lang="ja-JP" altLang="en-US" smtClean="0"/>
-              <a:t>2024/10/2</a:t>
+              <a:t>2025/6/10</a:t>
             </a:fld>
             <a:endParaRPr kumimoji="1" lang="ja-JP" altLang="en-US"/>
           </a:p>
@@ -1571,7 +1571,7 @@
           <a:p>
             <a:fld id="{E9CC885B-4903-4D54-9A93-00025F12DED9}" type="datetimeFigureOut">
               <a:rPr kumimoji="1" lang="ja-JP" altLang="en-US" smtClean="0"/>
-              <a:t>2024/10/2</a:t>
+              <a:t>2025/6/10</a:t>
             </a:fld>
             <a:endParaRPr kumimoji="1" lang="ja-JP" altLang="en-US"/>
           </a:p>
@@ -2047,7 +2047,7 @@
           <a:p>
             <a:fld id="{E9CC885B-4903-4D54-9A93-00025F12DED9}" type="datetimeFigureOut">
               <a:rPr kumimoji="1" lang="ja-JP" altLang="en-US" smtClean="0"/>
-              <a:t>2024/10/2</a:t>
+              <a:t>2025/6/10</a:t>
             </a:fld>
             <a:endParaRPr kumimoji="1" lang="ja-JP" altLang="en-US"/>
           </a:p>
@@ -2188,7 +2188,7 @@
           <a:p>
             <a:fld id="{E9CC885B-4903-4D54-9A93-00025F12DED9}" type="datetimeFigureOut">
               <a:rPr kumimoji="1" lang="ja-JP" altLang="en-US" smtClean="0"/>
-              <a:t>2024/10/2</a:t>
+              <a:t>2025/6/10</a:t>
             </a:fld>
             <a:endParaRPr kumimoji="1" lang="ja-JP" altLang="en-US"/>
           </a:p>
@@ -2301,7 +2301,7 @@
           <a:p>
             <a:fld id="{E9CC885B-4903-4D54-9A93-00025F12DED9}" type="datetimeFigureOut">
               <a:rPr kumimoji="1" lang="ja-JP" altLang="en-US" smtClean="0"/>
-              <a:t>2024/10/2</a:t>
+              <a:t>2025/6/10</a:t>
             </a:fld>
             <a:endParaRPr kumimoji="1" lang="ja-JP" altLang="en-US"/>
           </a:p>
@@ -2644,7 +2644,7 @@
           <a:p>
             <a:fld id="{E9CC885B-4903-4D54-9A93-00025F12DED9}" type="datetimeFigureOut">
               <a:rPr kumimoji="1" lang="ja-JP" altLang="en-US" smtClean="0"/>
-              <a:t>2024/10/2</a:t>
+              <a:t>2025/6/10</a:t>
             </a:fld>
             <a:endParaRPr kumimoji="1" lang="ja-JP" altLang="en-US"/>
           </a:p>
@@ -2932,7 +2932,7 @@
           <a:p>
             <a:fld id="{E9CC885B-4903-4D54-9A93-00025F12DED9}" type="datetimeFigureOut">
               <a:rPr kumimoji="1" lang="ja-JP" altLang="en-US" smtClean="0"/>
-              <a:t>2024/10/2</a:t>
+              <a:t>2025/6/10</a:t>
             </a:fld>
             <a:endParaRPr kumimoji="1" lang="ja-JP" altLang="en-US"/>
           </a:p>
@@ -3205,7 +3205,7 @@
           <a:p>
             <a:fld id="{E9CC885B-4903-4D54-9A93-00025F12DED9}" type="datetimeFigureOut">
               <a:rPr kumimoji="1" lang="ja-JP" altLang="en-US" smtClean="0"/>
-              <a:t>2024/10/2</a:t>
+              <a:t>2025/6/10</a:t>
             </a:fld>
             <a:endParaRPr kumimoji="1" lang="ja-JP" altLang="en-US"/>
           </a:p>
@@ -3885,6 +3885,60 @@
           <a:chExt cx="0" cy="0"/>
         </a:xfrm>
       </p:grpSpPr>
+      <p:sp>
+        <p:nvSpPr>
+          <p:cNvPr id="2" name="四角形: 角を丸くする 1">
+            <a:extLst>
+              <a:ext uri="{FF2B5EF4-FFF2-40B4-BE49-F238E27FC236}">
+                <a16:creationId xmlns:a16="http://schemas.microsoft.com/office/drawing/2014/main" id="{25B571B3-FF21-441E-AE36-060BAE3E38D2}"/>
+              </a:ext>
+            </a:extLst>
+          </p:cNvPr>
+          <p:cNvSpPr/>
+          <p:nvPr/>
+        </p:nvSpPr>
+        <p:spPr>
+          <a:xfrm>
+            <a:off x="338667" y="1837267"/>
+            <a:ext cx="4749800" cy="2209800"/>
+          </a:xfrm>
+          <a:prstGeom prst="roundRect">
+            <a:avLst/>
+          </a:prstGeom>
+          <a:solidFill>
+            <a:schemeClr val="bg1">
+              <a:lumMod val="85000"/>
+            </a:schemeClr>
+          </a:solidFill>
+          <a:ln>
+            <a:noFill/>
+          </a:ln>
+        </p:spPr>
+        <p:style>
+          <a:lnRef idx="2">
+            <a:schemeClr val="accent1">
+              <a:shade val="50000"/>
+            </a:schemeClr>
+          </a:lnRef>
+          <a:fillRef idx="1">
+            <a:schemeClr val="accent1"/>
+          </a:fillRef>
+          <a:effectRef idx="0">
+            <a:schemeClr val="accent1"/>
+          </a:effectRef>
+          <a:fontRef idx="minor">
+            <a:schemeClr val="lt1"/>
+          </a:fontRef>
+        </p:style>
+        <p:txBody>
+          <a:bodyPr rtlCol="0" anchor="ctr"/>
+          <a:lstStyle/>
+          <a:p>
+            <a:pPr algn="ctr"/>
+            <a:endParaRPr kumimoji="1" lang="ja-JP" altLang="en-US"/>
+          </a:p>
+        </p:txBody>
+      </p:sp>
       <p:sp>
         <p:nvSpPr>
           <p:cNvPr id="4" name="テキスト ボックス 3">
@@ -7654,6 +7708,60 @@
           <a:chExt cx="0" cy="0"/>
         </a:xfrm>
       </p:grpSpPr>
+      <p:sp>
+        <p:nvSpPr>
+          <p:cNvPr id="5" name="四角形: 角を丸くする 4">
+            <a:extLst>
+              <a:ext uri="{FF2B5EF4-FFF2-40B4-BE49-F238E27FC236}">
+                <a16:creationId xmlns:a16="http://schemas.microsoft.com/office/drawing/2014/main" id="{DD8DB09C-9BA2-4619-A909-51BA7304BE13}"/>
+              </a:ext>
+            </a:extLst>
+          </p:cNvPr>
+          <p:cNvSpPr/>
+          <p:nvPr/>
+        </p:nvSpPr>
+        <p:spPr>
+          <a:xfrm>
+            <a:off x="304525" y="2108586"/>
+            <a:ext cx="8043608" cy="2361813"/>
+          </a:xfrm>
+          <a:prstGeom prst="roundRect">
+            <a:avLst/>
+          </a:prstGeom>
+          <a:solidFill>
+            <a:schemeClr val="bg1">
+              <a:lumMod val="85000"/>
+            </a:schemeClr>
+          </a:solidFill>
+          <a:ln>
+            <a:noFill/>
+          </a:ln>
+        </p:spPr>
+        <p:style>
+          <a:lnRef idx="2">
+            <a:schemeClr val="accent1">
+              <a:shade val="50000"/>
+            </a:schemeClr>
+          </a:lnRef>
+          <a:fillRef idx="1">
+            <a:schemeClr val="accent1"/>
+          </a:fillRef>
+          <a:effectRef idx="0">
+            <a:schemeClr val="accent1"/>
+          </a:effectRef>
+          <a:fontRef idx="minor">
+            <a:schemeClr val="lt1"/>
+          </a:fontRef>
+        </p:style>
+        <p:txBody>
+          <a:bodyPr rtlCol="0" anchor="ctr"/>
+          <a:lstStyle/>
+          <a:p>
+            <a:pPr algn="ctr"/>
+            <a:endParaRPr kumimoji="1" lang="ja-JP" altLang="en-US"/>
+          </a:p>
+        </p:txBody>
+      </p:sp>
       <p:sp>
         <p:nvSpPr>
           <p:cNvPr id="4" name="テキスト ボックス 3">
@@ -13852,8 +13960,8 @@
           </a:p>
         </p:txBody>
       </p:sp>
-      <mc:AlternateContent xmlns:mc="http://schemas.openxmlformats.org/markup-compatibility/2006">
-        <mc:Choice xmlns:a14="http://schemas.microsoft.com/office/drawing/2010/main" Requires="a14">
+      <mc:AlternateContent xmlns:mc="http://schemas.openxmlformats.org/markup-compatibility/2006" xmlns:a14="http://schemas.microsoft.com/office/drawing/2010/main">
+        <mc:Choice Requires="a14">
           <p:sp>
             <p:nvSpPr>
               <p:cNvPr id="53" name="テキスト ボックス 52">
@@ -13909,7 +14017,7 @@
             </p:txBody>
           </p:sp>
         </mc:Choice>
-        <mc:Fallback>
+        <mc:Fallback xmlns="">
           <p:sp>
             <p:nvSpPr>
               <p:cNvPr id="53" name="テキスト ボックス 52">
@@ -16214,8 +16322,8 @@
           </a:p>
         </p:txBody>
       </p:sp>
-      <mc:AlternateContent xmlns:mc="http://schemas.openxmlformats.org/markup-compatibility/2006">
-        <mc:Choice xmlns:a14="http://schemas.microsoft.com/office/drawing/2010/main" Requires="a14">
+      <mc:AlternateContent xmlns:mc="http://schemas.openxmlformats.org/markup-compatibility/2006" xmlns:a14="http://schemas.microsoft.com/office/drawing/2010/main">
+        <mc:Choice Requires="a14">
           <p:sp>
             <p:nvSpPr>
               <p:cNvPr id="53" name="テキスト ボックス 52">
@@ -16271,7 +16379,7 @@
             </p:txBody>
           </p:sp>
         </mc:Choice>
-        <mc:Fallback>
+        <mc:Fallback xmlns="">
           <p:sp>
             <p:nvSpPr>
               <p:cNvPr id="53" name="テキスト ボックス 52">
